--- a/docs/prerequisites/cen207-prerequisites-slides.tr.pptx
+++ b/docs/prerequisites/cen207-prerequisites-slides.tr.pptx
@@ -15079,7 +15079,7 @@
                   <a:srgbClr val="1F2D3A"/>
                 </a:solidFill>
               </a:rPr>
-              <a:t>Burada kullanıldığı yer: proje rehberinin iş akışı (çatallama, plan, teslim) — her iki kontrol noktası için</a:t>
+              <a:t>Burada kullanıldığı yer: proje rehberinin iş akışı (şablondan depo, plan, teslim) — her iki kontrol noktası için</a:t>
             </a:r>
           </a:p>
         </p:txBody>
@@ -15543,7 +15543,7 @@
         <p:spPr>
           <a:xfrm>
             <a:off x="640080" y="1325880"/>
-            <a:ext cx="10911535" cy="1549400"/>
+            <a:ext cx="10911535" cy="1879600"/>
           </a:xfrm>
           <a:prstGeom prst="rect">
             <a:avLst/>
@@ -15575,7 +15575,7 @@
                   <a:srgbClr val="1F2D3A"/>
                 </a:solidFill>
               </a:rPr>
-              <a:t>Bir şablonu çatallamak (fork), derlemek, testlerini ve dokümantasyonunu üretmek</a:t>
+              <a:t>Şablondan özel depo oluşturmak ("Use this template", fork değil), derlemek, testlerini ve dokümantasyonunu üretmek</a:t>
             </a:r>
           </a:p>
           <a:p>
